--- a/hackathon/goai-2026-submission/WeFinance-GOAI2026-初赛PPT-v1.pptx
+++ b/hackathon/goai-2026-submission/WeFinance-GOAI2026-初赛PPT-v1.pptx
@@ -3626,7 +3626,7 @@
                   <a:srgbClr val="1E293B"/>
                 </a:solidFill>
               </a:rPr>
-              <a:t>实测中顺带发现并修复两个真实工程缺陷（st.dataframe 参数兼容崩溃、pyarrow/numpy ABI 不兼容导致的原生崩溃）；GOAI 参赛材料</a:t>
+              <a:t>实测中顺带发现并修复三个真实工程缺陷（st.dataframe 参数兼容崩溃、pyarrow/numpy ABI 不兼容导致的原生崩溃、线上 Python 版本配置错误）；GOAI 参赛材料</a:t>
             </a:r>
           </a:p>
         </p:txBody>
@@ -4901,7 +4901,7 @@
                   <a:srgbClr val="1E293B"/>
                 </a:solidFill>
               </a:rPr>
-              <a:t>线上实测（2026-08-08，未通过，如实标注）：Streamlit Cloud 因 ModuleNotFoundError 无法加载，属平台侧环境问题，需登录 Dashboard 重新部署</a:t>
+              <a:t>线上实测（2026-08-09）：Streamlit Cloud Python 版本配置错误（3.13）导致全部页面无法加载，已修复为 3.10 并重新验证，页面恢复正常</a:t>
             </a:r>
           </a:p>
           <a:p>
@@ -4916,7 +4916,7 @@
                   <a:srgbClr val="1E293B"/>
                 </a:solidFill>
               </a:rPr>
-              <a:t>实测中顺带发现并修复三个真实工程缺陷：理财建议合规风险、st.dataframe 参数兼容崩溃、pyarrow/numpy ABI 不兼容崩溃</a:t>
+              <a:t>线上真实上传账单触发 OCR 调用，因 Secrets 中 API key 被服务商拒绝（403）未跑通，非代码问题，失败路径按设计优雅降级</a:t>
             </a:r>
           </a:p>
         </p:txBody>

--- a/hackathon/goai-2026-submission/WeFinance-GOAI2026-初赛PPT-v1.pptx
+++ b/hackathon/goai-2026-submission/WeFinance-GOAI2026-初赛PPT-v1.pptx
@@ -3391,7 +3391,7 @@
                   <a:srgbClr val="1E293B"/>
                 </a:solidFill>
               </a:rPr>
-              <a:t>近期：修复线上 Streamlit Cloud 部署问题，稳定 Demo 可用性</a:t>
+              <a:t>近期：线上部署问题已修复（Python 3.13→3.10），待用户更新 API key 后复测 OCR 全链路</a:t>
             </a:r>
           </a:p>
           <a:p>
@@ -3596,7 +3596,7 @@
                   <a:srgbClr val="1E293B"/>
                 </a:solidFill>
               </a:rPr>
-              <a:t>原有基础：2025 年 11 月至 2026 年 1 月开发的完整产品，票据识别、消费分析、AI 顾问、投资建议四大核心链路已上线运行，GitHub 128 星</a:t>
+              <a:t>原有基础：2025 年 11 月开发的完整产品，票据识别、消费分析、AI 顾问、投资建议四大核心链路已上线运行，GitHub 128 星</a:t>
             </a:r>
           </a:p>
           <a:p>
@@ -3626,7 +3626,7 @@
                   <a:srgbClr val="1E293B"/>
                 </a:solidFill>
               </a:rPr>
-              <a:t>实测中顺带发现并修复三个真实工程缺陷（st.dataframe 参数兼容崩溃、pyarrow/numpy ABI 不兼容导致的原生崩溃、线上 Python 版本配置错误）；GOAI 参赛材料</a:t>
+              <a:t>实测中顺带发现并修复四个真实工程缺陷（st.dataframe 参数兼容崩溃、pyarrow/numpy ABI 不兼容导致的原生崩溃、线上 Python 版本配置错误、财务健康卡片 HTML 渲染为纯文本）；GOAI 参赛材料</a:t>
             </a:r>
           </a:p>
         </p:txBody>
@@ -4461,7 +4461,7 @@
                   <a:srgbClr val="1E293B"/>
                 </a:solidFill>
               </a:rPr>
-              <a:t>结果交付：结构化交易记录、异常预警卡片、可解释推理链（理财建议附带 rationale_steps）</a:t>
+              <a:t>结果交付：结构化交易记录、异常预警卡片、经营画像聚合视图（交易对手集中度/收支趋势）、可解释推理链（理财建议附带 rationale_steps）</a:t>
             </a:r>
           </a:p>
           <a:p>
@@ -4696,7 +4696,7 @@
                   <a:srgbClr val="1E293B"/>
                 </a:solidFill>
               </a:rPr>
-              <a:t>全部服务层通过 @safe_call 装饰器提供超时保护和优雅降级</a:t>
+              <a:t>多数服务层通过 @safe_call 装饰器提供超时保护和优雅降级；Chat 走独立的重试+退避机制</a:t>
             </a:r>
           </a:p>
           <a:p>

--- a/hackathon/goai-2026-submission/WeFinance-GOAI2026-初赛PPT-v1.pptx
+++ b/hackathon/goai-2026-submission/WeFinance-GOAI2026-初赛PPT-v1.pptx
@@ -5540,7 +5540,7 @@
                   <a:srgbClr val="1E293B"/>
                 </a:solidFill>
               </a:rPr>
-              <a:t>票据识别、异常检测、推荐引擎均为独立服务层，可拆分复用于其他记账类应用</a:t>
+              <a:t>票据识别、推荐引擎为独立服务层，可拆分复用于其他记账类应用</a:t>
             </a:r>
           </a:p>
           <a:p>

--- a/hackathon/goai-2026-submission/WeFinance-GOAI2026-初赛PPT-v1.pptx
+++ b/hackathon/goai-2026-submission/WeFinance-GOAI2026-初赛PPT-v1.pptx
@@ -4901,7 +4901,7 @@
                   <a:srgbClr val="1E293B"/>
                 </a:solidFill>
               </a:rPr>
-              <a:t>线上实测（2026-08-09）：Streamlit Cloud Python 版本配置错误（3.13）导致全部页面无法加载，已修复为 3.10 并重新验证，页面恢复正常</a:t>
+              <a:t>线上实测（2026-08-11，通过）：真实上传样例账单触发线上 OCR 调用，4/4 笔交易全部正确识别（商户/日期/金额/分类）</a:t>
             </a:r>
           </a:p>
           <a:p>
@@ -4916,7 +4916,7 @@
                   <a:srgbClr val="1E293B"/>
                 </a:solidFill>
               </a:rPr>
-              <a:t>线上真实上传账单触发 OCR 调用，因 Secrets 中 API key 被服务商拒绝（403）未跑通，非代码问题，失败路径按设计优雅降级</a:t>
+              <a:t>过程中定位到服务商侧模型下线（Qwen2-VL-72B-Instruct 已 deprecated）导致的持续 403，切换至当前活跃模型后修复，非代码缺陷</a:t>
             </a:r>
           </a:p>
         </p:txBody>

--- a/hackathon/goai-2026-submission/WeFinance-GOAI2026-初赛PPT-v1.pptx
+++ b/hackathon/goai-2026-submission/WeFinance-GOAI2026-初赛PPT-v1.pptx
@@ -3391,7 +3391,7 @@
                   <a:srgbClr val="1E293B"/>
                 </a:solidFill>
               </a:rPr>
-              <a:t>近期：线上部署问题已修复（Python 3.13→3.10），待用户更新 API key 后复测 OCR 全链路</a:t>
+              <a:t>近期：线上部署问题（Python 版本、OCR 模型下线）已修复并复测通过；补齐 tests/ 测试套件</a:t>
             </a:r>
           </a:p>
           <a:p>
